--- a/AUTOCAD INTECAP/apuntes powerpoint/COTAS CLASE  LUNES 9 DE MARZO.pptx
+++ b/AUTOCAD INTECAP/apuntes powerpoint/COTAS CLASE  LUNES 9 DE MARZO.pptx
@@ -16,6 +16,14 @@
     <p:sldId id="263" r:id="rId10"/>
     <p:sldId id="264" r:id="rId11"/>
     <p:sldId id="265" r:id="rId12"/>
+    <p:sldId id="267" r:id="rId13"/>
+    <p:sldId id="268" r:id="rId14"/>
+    <p:sldId id="269" r:id="rId15"/>
+    <p:sldId id="270" r:id="rId16"/>
+    <p:sldId id="271" r:id="rId17"/>
+    <p:sldId id="272" r:id="rId18"/>
+    <p:sldId id="273" r:id="rId19"/>
+    <p:sldId id="274" r:id="rId20"/>
   </p:sldIdLst>
   <p:sldSz cx="12192000" cy="6858000"/>
   <p:notesSz cx="6858000" cy="9144000"/>
@@ -114,7 +122,273 @@
       </a:defRPr>
     </a:lvl9pPr>
   </p:defaultTextStyle>
+  <p:extLst>
+    <p:ext uri="{EFAFB233-063F-42B5-8137-9DF3F51BA10A}">
+      <p15:sldGuideLst xmlns:p15="http://schemas.microsoft.com/office/powerpoint/2012/main"/>
+    </p:ext>
+  </p:extLst>
 </p:presentation>
+</file>
+
+<file path=ppt/ink/ink1.xml><?xml version="1.0" encoding="utf-8"?>
+<inkml:ink xmlns:inkml="http://www.w3.org/2003/InkML">
+  <inkml:definitions>
+    <inkml:context xml:id="ctx0">
+      <inkml:inkSource xml:id="inkSrc0">
+        <inkml:traceFormat>
+          <inkml:channel name="X" type="integer" min="-2.14748E9" max="2.14748E9" units="cm"/>
+          <inkml:channel name="Y" type="integer" min="-2.14748E9" max="2.14748E9" units="cm"/>
+        </inkml:traceFormat>
+        <inkml:channelProperties>
+          <inkml:channelProperty channel="X" name="resolution" value="1000" units="1/cm"/>
+          <inkml:channelProperty channel="Y" name="resolution" value="1000" units="1/cm"/>
+        </inkml:channelProperties>
+      </inkml:inkSource>
+      <inkml:timestamp xml:id="ts0" timeString="2026-03-18T21:43:25.931"/>
+    </inkml:context>
+    <inkml:brush xml:id="br0">
+      <inkml:brushProperty name="width" value="0.3" units="cm"/>
+      <inkml:brushProperty name="height" value="0.6" units="cm"/>
+      <inkml:brushProperty name="color" value="#FFFC00"/>
+      <inkml:brushProperty name="tip" value="rectangle"/>
+      <inkml:brushProperty name="rasterOp" value="maskPen"/>
+      <inkml:brushProperty name="ignorePressure" value="1"/>
+    </inkml:brush>
+  </inkml:definitions>
+  <inkml:trace contextRef="#ctx0" brushRef="#br0">0 629,'8'6,"-1"1,2-2,-1 1,1-1,-1 0,1-1,18 6,380 121,-311-104,1828 412,-1058-320,-744-112,1-5,-1-6,0-5,0-5,130-33,-127 14,-41 8,1 5,172-18,-76 33,95-6,-234 7,1-3,-1-1,0-2,55-21,-80 24,-1-1,0 0,-1-1,0-1,0 0,22-21,-11 5,-1-2,26-37,-31 42,1 0,1 2,0 1,29-20,6-6,42-30,-62 49,0-2,59-61,-93 88,-1 0,0-1,0 1,0-1,-1 1,1-1,-1 0,1 1,-1-1,0 0,0 0,0 0,0 0,-1 0,1-6,-1 7,0 1,-1-1,1 0,-1 0,0 0,1 1,-1-1,0 0,0 1,0-1,0 1,0-1,-1 1,1-1,0 1,-1 0,1 0,-1-1,-2 0,-9-5,-1 1,0 1,0 0,0 1,-24-4,14 3,-91-18,-1 5,-1 5,-1 5,-198 12,97 17,-347 79,398-62,-332 31,141-57,0-16,1-15,-617-114,-551-253,1374 339,128 37,35 9,290 60,-210-38,302 71,103 20,95 6,1142 135,12-84,-1149-126,-94-16,-108-11,237-10,-611-7,17-1,-91-4,-519-34,66 14,-3005-19,3171 55,329-10,-81 3,-186 30,206-12,68-19,1 0,0 0,-1 0,1 0,1 1,-1 0,0-1,0 1,1 1,0-1,-6 8,8-10,1 0,-1-1,0 1,1 0,-1 0,1 1,-1-1,1 0,0 0,0 0,-1 0,1 0,0 0,0 0,0 1,0-1,0 0,0 0,0 0,1 0,-1 0,0 1,1-1,-1 0,0 0,1 0,0 0,-1 0,1 0,-1 0,1 0,0-1,1 2,2 1,0 1,1-1,-1 0,1-1,0 1,0-1,8 3,43 11,0-3,0-2,109 7,-86-10,408 38,194 22,37 6</inkml:trace>
+</inkml:ink>
+</file>
+
+<file path=ppt/ink/ink2.xml><?xml version="1.0" encoding="utf-8"?>
+<inkml:ink xmlns:inkml="http://www.w3.org/2003/InkML">
+  <inkml:definitions>
+    <inkml:context xml:id="ctx0">
+      <inkml:inkSource xml:id="inkSrc0">
+        <inkml:traceFormat>
+          <inkml:channel name="X" type="integer" min="-2.14748E9" max="2.14748E9" units="cm"/>
+          <inkml:channel name="Y" type="integer" min="-2.14748E9" max="2.14748E9" units="cm"/>
+        </inkml:traceFormat>
+        <inkml:channelProperties>
+          <inkml:channelProperty channel="X" name="resolution" value="1000" units="1/cm"/>
+          <inkml:channelProperty channel="Y" name="resolution" value="1000" units="1/cm"/>
+        </inkml:channelProperties>
+      </inkml:inkSource>
+      <inkml:timestamp xml:id="ts0" timeString="2026-03-18T21:43:34.250"/>
+    </inkml:context>
+    <inkml:brush xml:id="br0">
+      <inkml:brushProperty name="width" value="0.3" units="cm"/>
+      <inkml:brushProperty name="height" value="0.6" units="cm"/>
+      <inkml:brushProperty name="color" value="#FFFC00"/>
+      <inkml:brushProperty name="tip" value="rectangle"/>
+      <inkml:brushProperty name="rasterOp" value="maskPen"/>
+      <inkml:brushProperty name="ignorePressure" value="1"/>
+    </inkml:brush>
+  </inkml:definitions>
+  <inkml:trace contextRef="#ctx0" brushRef="#br0">0 0</inkml:trace>
+</inkml:ink>
+</file>
+
+<file path=ppt/ink/ink3.xml><?xml version="1.0" encoding="utf-8"?>
+<inkml:ink xmlns:inkml="http://www.w3.org/2003/InkML">
+  <inkml:definitions>
+    <inkml:context xml:id="ctx0">
+      <inkml:inkSource xml:id="inkSrc0">
+        <inkml:traceFormat>
+          <inkml:channel name="X" type="integer" min="-2.14748E9" max="2.14748E9" units="cm"/>
+          <inkml:channel name="Y" type="integer" min="-2.14748E9" max="2.14748E9" units="cm"/>
+        </inkml:traceFormat>
+        <inkml:channelProperties>
+          <inkml:channelProperty channel="X" name="resolution" value="1000" units="1/cm"/>
+          <inkml:channelProperty channel="Y" name="resolution" value="1000" units="1/cm"/>
+        </inkml:channelProperties>
+      </inkml:inkSource>
+      <inkml:timestamp xml:id="ts0" timeString="2026-03-18T21:43:54.882"/>
+    </inkml:context>
+    <inkml:brush xml:id="br0">
+      <inkml:brushProperty name="width" value="0.3" units="cm"/>
+      <inkml:brushProperty name="height" value="0.6" units="cm"/>
+      <inkml:brushProperty name="color" value="#FFFC00"/>
+      <inkml:brushProperty name="tip" value="rectangle"/>
+      <inkml:brushProperty name="rasterOp" value="maskPen"/>
+      <inkml:brushProperty name="ignorePressure" value="1"/>
+    </inkml:brush>
+  </inkml:definitions>
+  <inkml:trace contextRef="#ctx0" brushRef="#br0">1 233,'9'1,"-1"0,1 0,-1 1,0 0,13 5,14 3,234 53,201 26,550 34,375-99,-1099-43,-1-12,490-117,-442 45,-148 27,-165 63,0-3,-1 0,42-32,-67 45,0 0,0 0,0-1,0 1,-1-1,0 0,1 0,-1 0,-1 0,1-1,2-6,-4 9,-1 0,1 0,-1 0,0 0,0 0,0 0,0 0,0 0,-1 0,1 0,-1 0,1 0,-1 0,-1-4,2 6</inkml:trace>
+</inkml:ink>
+</file>
+
+<file path=ppt/ink/ink4.xml><?xml version="1.0" encoding="utf-8"?>
+<inkml:ink xmlns:inkml="http://www.w3.org/2003/InkML">
+  <inkml:definitions>
+    <inkml:context xml:id="ctx0">
+      <inkml:inkSource xml:id="inkSrc0">
+        <inkml:traceFormat>
+          <inkml:channel name="X" type="integer" min="-2.14748E9" max="2.14748E9" units="cm"/>
+          <inkml:channel name="Y" type="integer" min="-2.14748E9" max="2.14748E9" units="cm"/>
+        </inkml:traceFormat>
+        <inkml:channelProperties>
+          <inkml:channelProperty channel="X" name="resolution" value="1000" units="1/cm"/>
+          <inkml:channelProperty channel="Y" name="resolution" value="1000" units="1/cm"/>
+        </inkml:channelProperties>
+      </inkml:inkSource>
+      <inkml:timestamp xml:id="ts0" timeString="2026-03-18T21:44:01.195"/>
+    </inkml:context>
+    <inkml:brush xml:id="br0">
+      <inkml:brushProperty name="width" value="0.3" units="cm"/>
+      <inkml:brushProperty name="height" value="0.6" units="cm"/>
+      <inkml:brushProperty name="color" value="#FFFC00"/>
+      <inkml:brushProperty name="tip" value="rectangle"/>
+      <inkml:brushProperty name="rasterOp" value="maskPen"/>
+      <inkml:brushProperty name="ignorePressure" value="1"/>
+    </inkml:brush>
+  </inkml:definitions>
+  <inkml:trace contextRef="#ctx0" brushRef="#br0">0 1,'0'0</inkml:trace>
+</inkml:ink>
+</file>
+
+<file path=ppt/ink/ink5.xml><?xml version="1.0" encoding="utf-8"?>
+<inkml:ink xmlns:inkml="http://www.w3.org/2003/InkML">
+  <inkml:definitions>
+    <inkml:context xml:id="ctx0">
+      <inkml:inkSource xml:id="inkSrc0">
+        <inkml:traceFormat>
+          <inkml:channel name="X" type="integer" min="-2.14748E9" max="2.14748E9" units="cm"/>
+          <inkml:channel name="Y" type="integer" min="-2.14748E9" max="2.14748E9" units="cm"/>
+        </inkml:traceFormat>
+        <inkml:channelProperties>
+          <inkml:channelProperty channel="X" name="resolution" value="1000" units="1/cm"/>
+          <inkml:channelProperty channel="Y" name="resolution" value="1000" units="1/cm"/>
+        </inkml:channelProperties>
+      </inkml:inkSource>
+      <inkml:timestamp xml:id="ts0" timeString="2026-03-18T21:50:05.382"/>
+    </inkml:context>
+    <inkml:brush xml:id="br0">
+      <inkml:brushProperty name="width" value="0.3" units="cm"/>
+      <inkml:brushProperty name="height" value="0.6" units="cm"/>
+      <inkml:brushProperty name="color" value="#FFFC00"/>
+      <inkml:brushProperty name="tip" value="rectangle"/>
+      <inkml:brushProperty name="rasterOp" value="maskPen"/>
+      <inkml:brushProperty name="ignorePressure" value="1"/>
+    </inkml:brush>
+  </inkml:definitions>
+  <inkml:trace contextRef="#ctx0" brushRef="#br0">1 1,'0'0</inkml:trace>
+</inkml:ink>
+</file>
+
+<file path=ppt/ink/ink6.xml><?xml version="1.0" encoding="utf-8"?>
+<inkml:ink xmlns:inkml="http://www.w3.org/2003/InkML">
+  <inkml:definitions>
+    <inkml:context xml:id="ctx0">
+      <inkml:inkSource xml:id="inkSrc0">
+        <inkml:traceFormat>
+          <inkml:channel name="X" type="integer" min="-2.14748E9" max="2.14748E9" units="cm"/>
+          <inkml:channel name="Y" type="integer" min="-2.14748E9" max="2.14748E9" units="cm"/>
+        </inkml:traceFormat>
+        <inkml:channelProperties>
+          <inkml:channelProperty channel="X" name="resolution" value="1000" units="1/cm"/>
+          <inkml:channelProperty channel="Y" name="resolution" value="1000" units="1/cm"/>
+        </inkml:channelProperties>
+      </inkml:inkSource>
+      <inkml:timestamp xml:id="ts0" timeString="2026-03-18T21:57:48.375"/>
+    </inkml:context>
+    <inkml:brush xml:id="br0">
+      <inkml:brushProperty name="width" value="0.3" units="cm"/>
+      <inkml:brushProperty name="height" value="0.6" units="cm"/>
+      <inkml:brushProperty name="color" value="#FFFC00"/>
+      <inkml:brushProperty name="tip" value="rectangle"/>
+      <inkml:brushProperty name="rasterOp" value="maskPen"/>
+      <inkml:brushProperty name="ignorePressure" value="1"/>
+    </inkml:brush>
+  </inkml:definitions>
+  <inkml:trace contextRef="#ctx0" brushRef="#br0">1157 627,'13'1,"0"1,0 0,0 1,-1 0,22 9,14 3,299 53,-201-44,771 143,-853-154,-21-3,1-3,0-1,0-1,65-4,-104-1,1 0,-1-1,0 0,0 0,1-1,-1 0,0 1,0-2,0 1,-1 0,1-1,4-4,-7 6,0-1,0 0,0-1,-1 1,1 0,-1 0,1-1,-1 1,0-1,0 1,0-1,-1 1,1-1,0 1,-1-1,0 0,0 0,0 1,0-1,0 0,0 1,0-1,-1 0,0 1,0-4,-3-7,0 1,-1-1,0 0,-1 1,-1 0,0 1,0-1,-1 1,0 1,-1 0,-19-18,11 15,0 1,0 0,-1 1,-1 1,0 1,0 0,-36-10,-308-75,177 49,-184-50,-443-108,-4 42,627 139,177 21,-1 0,0 1,0 1,0 0,-24 5,37-6,0 0,0 0,0 1,0-1,-1 0,1 1,0-1,1 1,-1-1,0 1,0 0,0-1,0 1,0 0,0-1,1 1,-1 0,0 0,1 0,-1 0,1 0,-1 0,1 0,-1 0,1 0,0 0,-1 0,1 0,0 0,0 0,0 0,0 0,0 0,0 0,0 0,0 1,0-1,0 0,1 0,-1 0,0 0,1 0,-1 0,1 0,-1 0,2 1,4 6,1 0,1 0,-1 0,1-1,1-1,-1 1,1-1,0-1,12 6,57 29,93 33,264 81,112 5,96-10,1512 221,-1628-310,-153-35,-256-20,163-15,-246 6,0-1,42-12,-75 16,-1 1,1 0,-1-1,1 1,-1-1,1 0,-1 1,0-1,1 0,-1 0,0 0,1 0,-1 0,1-2,-2 3,1-1,-1 1,0 0,0-1,0 1,0-1,0 1,0-1,0 1,0-1,0 1,0 0,0-1,-1 1,1-1,0 1,0-1,0 1,0 0,-1-1,1 1,0-1,-1 1,1 0,0-1,0 1,-1 0,1 0,-1-1,0 1,-42-22,9 11,0 2,0 0,-1 3,-36-3,-151 0,149 7,-1672-69,1594 57,143 14,0-2,0 1,0-1,1 0,-1 0,-9-5,17 7,0 0,-1-1,1 1,0 0,0 0,-1 0,1-1,0 1,0 0,0 0,-1-1,1 1,0 0,0 0,0-1,0 1,0 0,0-1,0 1,0 0,-1-1,1 1,0 0,0 0,0-1,0 1,1 0,-1-1,0 1,0 0,0-1,0 1,0 0,0 0,0-1,0 1,1 0,-1 0,0-1,0 1,0 0,1 0,-1-1,0 1,0 0,1 0,-1-1,35-15,-31 15,242-92,-131 45,2 5,2 5,1 6,207-29,94 27,-259 29</inkml:trace>
+</inkml:ink>
+</file>
+
+<file path=ppt/ink/ink7.xml><?xml version="1.0" encoding="utf-8"?>
+<inkml:ink xmlns:inkml="http://www.w3.org/2003/InkML">
+  <inkml:definitions>
+    <inkml:context xml:id="ctx0">
+      <inkml:inkSource xml:id="inkSrc0">
+        <inkml:traceFormat>
+          <inkml:channel name="X" type="integer" min="-2.14748E9" max="2.14748E9" units="cm"/>
+          <inkml:channel name="Y" type="integer" min="-2.14748E9" max="2.14748E9" units="cm"/>
+        </inkml:traceFormat>
+        <inkml:channelProperties>
+          <inkml:channelProperty channel="X" name="resolution" value="1000" units="1/cm"/>
+          <inkml:channelProperty channel="Y" name="resolution" value="1000" units="1/cm"/>
+        </inkml:channelProperties>
+      </inkml:inkSource>
+      <inkml:timestamp xml:id="ts0" timeString="2026-03-18T21:57:49.450"/>
+    </inkml:context>
+    <inkml:brush xml:id="br0">
+      <inkml:brushProperty name="width" value="0.3" units="cm"/>
+      <inkml:brushProperty name="height" value="0.6" units="cm"/>
+      <inkml:brushProperty name="color" value="#FFFC00"/>
+      <inkml:brushProperty name="tip" value="rectangle"/>
+      <inkml:brushProperty name="rasterOp" value="maskPen"/>
+      <inkml:brushProperty name="ignorePressure" value="1"/>
+    </inkml:brush>
+  </inkml:definitions>
+  <inkml:trace contextRef="#ctx0" brushRef="#br0">1061 380,'8'0,"-1"1,0 0,0 0,0 0,0 1,0 0,0 1,-1 0,1 0,-1 0,0 1,12 8,3 5,-1 1,22 27,-21-23,36 32,-12-22,2-2,1-2,1-3,77 29,162 50,34-7,4-15,3-14,2-15,567 19,-774-71,0-4,170-27,-284 28,21-3,46-15,-71 18,-1 1,1-2,-1 1,0-1,1 0,-1 0,0 0,0-1,-1 1,1-1,-1 0,0-1,7-8,-10 10,0 1,0 0,0-1,0 1,0-1,-1 1,0-1,1 1,-1-1,0 0,0 1,0-1,0 1,-1-1,1 1,-1-1,1 1,-1-1,0 1,0 0,0-1,0 1,-1 0,-1-3,-5-6,-1 0,0 1,-15-14,22 22,-35-28,0 1,-2 2,-2 1,0 3,-56-24,-181-73,-234-66,-652-147,687 229,334 79,-184-7,26 39,156 1,-130-2,-466 38,736-44,-15 3,1 0,0 1,0 0,-30 13,48-17,-1 1,1 0,-1 0,1-1,0 1,-1 0,1 0,0 0,0 1,0-1,0 0,0 0,0 1,0-1,0 0,0 1,1-1,-1 1,0-1,1 1,-1-1,1 1,0-1,-1 1,1 0,0-1,0 1,0-1,0 1,1 0,-1-1,0 1,1-1,-1 1,1-1,-1 1,1-1,0 1,-1-1,2 2,2 4,0-1,1 1,0-1,0 0,0-1,0 1,9 5,-3-3,2 0,-1 0,1-2,0 1,0-2,1 0,0 0,15 2,90 22,0-5,132 8,-163-26,0-4,0-4,150-22,-144 5,147-51,-40-6,-106 36</inkml:trace>
+</inkml:ink>
+</file>
+
+<file path=ppt/ink/ink8.xml><?xml version="1.0" encoding="utf-8"?>
+<inkml:ink xmlns:inkml="http://www.w3.org/2003/InkML">
+  <inkml:definitions>
+    <inkml:context xml:id="ctx0">
+      <inkml:inkSource xml:id="inkSrc0">
+        <inkml:traceFormat>
+          <inkml:channel name="X" type="integer" min="-2.14748E9" max="2.14748E9" units="cm"/>
+          <inkml:channel name="Y" type="integer" min="-2.14748E9" max="2.14748E9" units="cm"/>
+        </inkml:traceFormat>
+        <inkml:channelProperties>
+          <inkml:channelProperty channel="X" name="resolution" value="1000" units="1/cm"/>
+          <inkml:channelProperty channel="Y" name="resolution" value="1000" units="1/cm"/>
+        </inkml:channelProperties>
+      </inkml:inkSource>
+      <inkml:timestamp xml:id="ts0" timeString="2026-03-18T21:57:50.660"/>
+    </inkml:context>
+    <inkml:brush xml:id="br0">
+      <inkml:brushProperty name="width" value="0.3" units="cm"/>
+      <inkml:brushProperty name="height" value="0.6" units="cm"/>
+      <inkml:brushProperty name="color" value="#FFFC00"/>
+      <inkml:brushProperty name="tip" value="rectangle"/>
+      <inkml:brushProperty name="rasterOp" value="maskPen"/>
+      <inkml:brushProperty name="ignorePressure" value="1"/>
+    </inkml:brush>
+  </inkml:definitions>
+  <inkml:trace contextRef="#ctx0" brushRef="#br0">3370 1185,'-16'-10,"0"0,-1 1,0 1,0 1,-31-9,18 6,-690-161,708 169,-17-4,-2 1,1-1,1-1,-1-2,-35-15,61 21,-1 0,0 0,1 0,-1 0,1-1,0 0,0 0,0 0,1 0,-1 0,1-1,0 0,0 1,1-1,0 0,0-1,0 1,0 0,-1-9,0-7,1 0,1 0,3-40,0 18,-2 27,0-1,-1 1,0 0,-2 0,0 1,-6-21,7 31,0-1,0 1,-1 0,0 0,0 0,0 0,-1 0,1 1,-1-1,0 1,-1 0,1 0,-1 1,1-1,-1 1,0 0,0 1,-1-1,1 1,0 0,-10-3,-4 2,0 0,0 1,0 1,-1 0,1 2,0 0,0 1,0 1,-21 6,30-7,0 1,0 0,1 0,-1 1,1 1,0-1,0 2,0-1,1 1,0 0,0 1,0 0,1 0,0 1,1-1,0 1,0 1,-9 16,14-23,0 0,0 0,1 0,-1 0,1 0,-1 0,1 0,0 0,-1 0,1 0,0 1,1-1,-1 0,0 0,1 0,-1 0,1 0,-1 0,1 0,0 0,0 0,0 0,0 0,0 0,0-1,1 1,-1 0,1-1,-1 1,1-1,-1 1,1-1,3 2,2 1,1 0,0-1,0 0,0 0,0-1,1 0,11 2,10-2,1 0,-1-2,1-1,-1-2,1 0,-1-3,0 0,-1-2,0-1,0-1,-1-2,0 0,-1-2,43-30,-62 37,0 0,-1 0,1 0,-2-1,1 0,-1-1,-1 1,1-1,-2 0,1-1,-1 1,0-1,-1 0,2-10,-4 14,0 0,0 0,0-1,-1 1,0 0,0-1,-1 1,0 0,0-1,0 1,-1 0,0 0,0 0,0 0,-1 0,0 1,0-1,-1 1,1 0,-1 0,0 0,-1 0,1 1,-6-5,-6-2,-1 1,-1 1,1 0,-1 1,-1 1,1 1,-1 1,-21-4,14 2,-418-76,-16 42,-25 30,397 16,1 3,0 5,-128 34,181-37,0 1,2 2,-34 18,59-28,1 0,0 1,0 0,1 0,-1 0,1 0,0 1,0 0,0 0,1 1,0-1,-4 8,7-11,0 0,1 0,-1 0,1 0,-1 0,1 0,0 0,0 0,0 0,0 0,0 0,0 0,1 0,-1 0,1 0,0 0,1 3,0-1,1 0,-1 0,1 0,1 0,-1 0,0-1,1 1,0-1,0 0,4 2,19 11,1-1,0-2,1-1,39 10,235 56,106-8,758 33,-1068-101,-72 2,-41 8,-4 0,-10 9,1 2,0 1,2 0,1 2,1 1,1 1,2 1,1 1,-22 44,31-53,1 0,1 0,1 1,1 0,1 0,0 0,2 1,1-1,0 1,2 0,1 0,0-1,2 1,1-1,0 1,9 21,-4-20,2-1,1 0,0 0,2-1,1-1,0 0,1-1,21 19,7 1,1-2,1-1,101 58,-18-26,3-5,261 87,304 25,-281-114,-95-47,-258-16,64-9,-106 7,0-1,-1-1,1-1,-1 0,-1-2,22-11,-31 14,-1-2,1 1,-2-1,1 0,-1-1,0 0,-1 0,0-1,0 0,-1 0,0-1,0 0,6-16,0 4,-8 15,0 1,0 1,1-1,0 0,0 1,7-5,-8 7,0-1,0 1,0-1,-1 0,1 0,-1-1,3-5,-5 8,0 0,-1 0,1-1,-1 1,0 0,1 0,-1 0,0-1,0 1,-1 0,1 0,0-1,-1 1,1 0,-1 0,0 0,0 0,0 0,0 0,0 0,0 0,-2-2,-2-3,-1 0,0 0,0 1,-1 0,0 0,0 0,0 1,-1 0,0 0,-13-5,-37-15</inkml:trace>
+</inkml:ink>
+</file>
+
+<file path=ppt/ink/ink9.xml><?xml version="1.0" encoding="utf-8"?>
+<inkml:ink xmlns:inkml="http://www.w3.org/2003/InkML">
+  <inkml:definitions>
+    <inkml:context xml:id="ctx0">
+      <inkml:inkSource xml:id="inkSrc0">
+        <inkml:traceFormat>
+          <inkml:channel name="X" type="integer" min="-2.14748E9" max="2.14748E9" units="cm"/>
+          <inkml:channel name="Y" type="integer" min="-2.14748E9" max="2.14748E9" units="cm"/>
+        </inkml:traceFormat>
+        <inkml:channelProperties>
+          <inkml:channelProperty channel="X" name="resolution" value="1000" units="1/cm"/>
+          <inkml:channelProperty channel="Y" name="resolution" value="1000" units="1/cm"/>
+        </inkml:channelProperties>
+      </inkml:inkSource>
+      <inkml:timestamp xml:id="ts0" timeString="2026-03-18T22:32:26.198"/>
+    </inkml:context>
+    <inkml:brush xml:id="br0">
+      <inkml:brushProperty name="width" value="0.3" units="cm"/>
+      <inkml:brushProperty name="height" value="0.6" units="cm"/>
+      <inkml:brushProperty name="color" value="#FFFC00"/>
+      <inkml:brushProperty name="tip" value="rectangle"/>
+      <inkml:brushProperty name="rasterOp" value="maskPen"/>
+      <inkml:brushProperty name="ignorePressure" value="1"/>
+    </inkml:brush>
+  </inkml:definitions>
+  <inkml:trace contextRef="#ctx0" brushRef="#br0">0 1,'0'0</inkml:trace>
+</inkml:ink>
 </file>
 
 <file path=ppt/slideLayouts/slideLayout1.xml><?xml version="1.0" encoding="utf-8"?>
@@ -266,7 +540,7 @@
           <a:p>
             <a:fld id="{5AAEB29B-58AF-44B1-A702-63C5B7077D5A}" type="datetimeFigureOut">
               <a:rPr lang="es-GT" smtClean="0"/>
-              <a:t>17/03/2026</a:t>
+              <a:t>18/03/2026</a:t>
             </a:fld>
             <a:endParaRPr lang="es-GT"/>
           </a:p>
@@ -466,7 +740,7 @@
           <a:p>
             <a:fld id="{5AAEB29B-58AF-44B1-A702-63C5B7077D5A}" type="datetimeFigureOut">
               <a:rPr lang="es-GT" smtClean="0"/>
-              <a:t>17/03/2026</a:t>
+              <a:t>18/03/2026</a:t>
             </a:fld>
             <a:endParaRPr lang="es-GT"/>
           </a:p>
@@ -676,7 +950,7 @@
           <a:p>
             <a:fld id="{5AAEB29B-58AF-44B1-A702-63C5B7077D5A}" type="datetimeFigureOut">
               <a:rPr lang="es-GT" smtClean="0"/>
-              <a:t>17/03/2026</a:t>
+              <a:t>18/03/2026</a:t>
             </a:fld>
             <a:endParaRPr lang="es-GT"/>
           </a:p>
@@ -876,7 +1150,7 @@
           <a:p>
             <a:fld id="{5AAEB29B-58AF-44B1-A702-63C5B7077D5A}" type="datetimeFigureOut">
               <a:rPr lang="es-GT" smtClean="0"/>
-              <a:t>17/03/2026</a:t>
+              <a:t>18/03/2026</a:t>
             </a:fld>
             <a:endParaRPr lang="es-GT"/>
           </a:p>
@@ -1152,7 +1426,7 @@
           <a:p>
             <a:fld id="{5AAEB29B-58AF-44B1-A702-63C5B7077D5A}" type="datetimeFigureOut">
               <a:rPr lang="es-GT" smtClean="0"/>
-              <a:t>17/03/2026</a:t>
+              <a:t>18/03/2026</a:t>
             </a:fld>
             <a:endParaRPr lang="es-GT"/>
           </a:p>
@@ -1420,7 +1694,7 @@
           <a:p>
             <a:fld id="{5AAEB29B-58AF-44B1-A702-63C5B7077D5A}" type="datetimeFigureOut">
               <a:rPr lang="es-GT" smtClean="0"/>
-              <a:t>17/03/2026</a:t>
+              <a:t>18/03/2026</a:t>
             </a:fld>
             <a:endParaRPr lang="es-GT"/>
           </a:p>
@@ -1835,7 +2109,7 @@
           <a:p>
             <a:fld id="{5AAEB29B-58AF-44B1-A702-63C5B7077D5A}" type="datetimeFigureOut">
               <a:rPr lang="es-GT" smtClean="0"/>
-              <a:t>17/03/2026</a:t>
+              <a:t>18/03/2026</a:t>
             </a:fld>
             <a:endParaRPr lang="es-GT"/>
           </a:p>
@@ -1977,7 +2251,7 @@
           <a:p>
             <a:fld id="{5AAEB29B-58AF-44B1-A702-63C5B7077D5A}" type="datetimeFigureOut">
               <a:rPr lang="es-GT" smtClean="0"/>
-              <a:t>17/03/2026</a:t>
+              <a:t>18/03/2026</a:t>
             </a:fld>
             <a:endParaRPr lang="es-GT"/>
           </a:p>
@@ -2090,7 +2364,7 @@
           <a:p>
             <a:fld id="{5AAEB29B-58AF-44B1-A702-63C5B7077D5A}" type="datetimeFigureOut">
               <a:rPr lang="es-GT" smtClean="0"/>
-              <a:t>17/03/2026</a:t>
+              <a:t>18/03/2026</a:t>
             </a:fld>
             <a:endParaRPr lang="es-GT"/>
           </a:p>
@@ -2403,7 +2677,7 @@
           <a:p>
             <a:fld id="{5AAEB29B-58AF-44B1-A702-63C5B7077D5A}" type="datetimeFigureOut">
               <a:rPr lang="es-GT" smtClean="0"/>
-              <a:t>17/03/2026</a:t>
+              <a:t>18/03/2026</a:t>
             </a:fld>
             <a:endParaRPr lang="es-GT"/>
           </a:p>
@@ -2692,7 +2966,7 @@
           <a:p>
             <a:fld id="{5AAEB29B-58AF-44B1-A702-63C5B7077D5A}" type="datetimeFigureOut">
               <a:rPr lang="es-GT" smtClean="0"/>
-              <a:t>17/03/2026</a:t>
+              <a:t>18/03/2026</a:t>
             </a:fld>
             <a:endParaRPr lang="es-GT"/>
           </a:p>
@@ -2935,7 +3209,7 @@
           <a:p>
             <a:fld id="{5AAEB29B-58AF-44B1-A702-63C5B7077D5A}" type="datetimeFigureOut">
               <a:rPr lang="es-GT" smtClean="0"/>
-              <a:t>17/03/2026</a:t>
+              <a:t>18/03/2026</a:t>
             </a:fld>
             <a:endParaRPr lang="es-GT"/>
           </a:p>
@@ -3436,6 +3710,87 @@
           </a:p>
         </p:txBody>
       </p:sp>
+      <p:pic>
+        <p:nvPicPr>
+          <p:cNvPr id="4" name="Imagen 3">
+            <a:extLst>
+              <a:ext uri="{FF2B5EF4-FFF2-40B4-BE49-F238E27FC236}">
+                <a16:creationId xmlns:a16="http://schemas.microsoft.com/office/drawing/2014/main" id="{5B2B1A93-783E-9742-AC00-2FD653C36CC7}"/>
+              </a:ext>
+            </a:extLst>
+          </p:cNvPr>
+          <p:cNvPicPr>
+            <a:picLocks noChangeAspect="1"/>
+          </p:cNvPicPr>
+          <p:nvPr/>
+        </p:nvPicPr>
+        <p:blipFill>
+          <a:blip r:embed="rId2"/>
+          <a:stretch>
+            <a:fillRect/>
+          </a:stretch>
+        </p:blipFill>
+        <p:spPr>
+          <a:xfrm>
+            <a:off x="2861811" y="1599944"/>
+            <a:ext cx="6468378" cy="3658111"/>
+          </a:xfrm>
+          <a:prstGeom prst="rect">
+            <a:avLst/>
+          </a:prstGeom>
+        </p:spPr>
+      </p:pic>
+      <mc:AlternateContent xmlns:mc="http://schemas.openxmlformats.org/markup-compatibility/2006">
+        <mc:Choice xmlns:p14="http://schemas.microsoft.com/office/powerpoint/2010/main" Requires="p14">
+          <p:contentPart p14:bwMode="auto" r:id="rId3">
+            <p14:nvContentPartPr>
+              <p14:cNvPr id="5" name="Entrada de lápiz 4">
+                <a:extLst>
+                  <a:ext uri="{FF2B5EF4-FFF2-40B4-BE49-F238E27FC236}">
+                    <a16:creationId xmlns:a16="http://schemas.microsoft.com/office/drawing/2014/main" id="{763CA650-D6B4-7C4B-32C7-B66717EB33EC}"/>
+                  </a:ext>
+                </a:extLst>
+              </p14:cNvPr>
+              <p14:cNvContentPartPr/>
+              <p14:nvPr/>
+            </p14:nvContentPartPr>
+            <p14:xfrm>
+              <a:off x="8102354" y="2447668"/>
+              <a:ext cx="1933920" cy="200520"/>
+            </p14:xfrm>
+          </p:contentPart>
+        </mc:Choice>
+        <mc:Fallback>
+          <p:pic>
+            <p:nvPicPr>
+              <p:cNvPr id="5" name="Entrada de lápiz 4">
+                <a:extLst>
+                  <a:ext uri="{FF2B5EF4-FFF2-40B4-BE49-F238E27FC236}">
+                    <a16:creationId xmlns:a16="http://schemas.microsoft.com/office/drawing/2014/main" id="{763CA650-D6B4-7C4B-32C7-B66717EB33EC}"/>
+                  </a:ext>
+                </a:extLst>
+              </p:cNvPr>
+              <p:cNvPicPr/>
+              <p:nvPr/>
+            </p:nvPicPr>
+            <p:blipFill>
+              <a:blip r:embed="rId4"/>
+              <a:stretch>
+                <a:fillRect/>
+              </a:stretch>
+            </p:blipFill>
+            <p:spPr>
+              <a:xfrm>
+                <a:off x="8048714" y="2339668"/>
+                <a:ext cx="2041560" cy="416160"/>
+              </a:xfrm>
+              <a:prstGeom prst="rect">
+                <a:avLst/>
+              </a:prstGeom>
+            </p:spPr>
+          </p:pic>
+        </mc:Fallback>
+      </mc:AlternateContent>
     </p:spTree>
     <p:extLst>
       <p:ext uri="{BB962C8B-B14F-4D97-AF65-F5344CB8AC3E}">
@@ -3491,10 +3846,846 @@
           </a:p>
         </p:txBody>
       </p:sp>
+      <mc:AlternateContent xmlns:mc="http://schemas.openxmlformats.org/markup-compatibility/2006">
+        <mc:Choice xmlns:p14="http://schemas.microsoft.com/office/powerpoint/2010/main" Requires="p14">
+          <p:contentPart p14:bwMode="auto" r:id="rId2">
+            <p14:nvContentPartPr>
+              <p14:cNvPr id="3" name="Entrada de lápiz 2">
+                <a:extLst>
+                  <a:ext uri="{FF2B5EF4-FFF2-40B4-BE49-F238E27FC236}">
+                    <a16:creationId xmlns:a16="http://schemas.microsoft.com/office/drawing/2014/main" id="{E77ACFDE-14AA-16DC-E4C4-0AEF7037691F}"/>
+                  </a:ext>
+                </a:extLst>
+              </p14:cNvPr>
+              <p14:cNvContentPartPr/>
+              <p14:nvPr/>
+            </p14:nvContentPartPr>
+            <p14:xfrm>
+              <a:off x="7610234" y="3713428"/>
+              <a:ext cx="360" cy="360"/>
+            </p14:xfrm>
+          </p:contentPart>
+        </mc:Choice>
+        <mc:Fallback>
+          <p:pic>
+            <p:nvPicPr>
+              <p:cNvPr id="3" name="Entrada de lápiz 2">
+                <a:extLst>
+                  <a:ext uri="{FF2B5EF4-FFF2-40B4-BE49-F238E27FC236}">
+                    <a16:creationId xmlns:a16="http://schemas.microsoft.com/office/drawing/2014/main" id="{E77ACFDE-14AA-16DC-E4C4-0AEF7037691F}"/>
+                  </a:ext>
+                </a:extLst>
+              </p:cNvPr>
+              <p:cNvPicPr/>
+              <p:nvPr/>
+            </p:nvPicPr>
+            <p:blipFill>
+              <a:blip r:embed="rId3"/>
+              <a:stretch>
+                <a:fillRect/>
+              </a:stretch>
+            </p:blipFill>
+            <p:spPr>
+              <a:xfrm>
+                <a:off x="7556234" y="3605788"/>
+                <a:ext cx="108000" cy="216000"/>
+              </a:xfrm>
+              <a:prstGeom prst="rect">
+                <a:avLst/>
+              </a:prstGeom>
+            </p:spPr>
+          </p:pic>
+        </mc:Fallback>
+      </mc:AlternateContent>
+      <mc:AlternateContent xmlns:mc="http://schemas.openxmlformats.org/markup-compatibility/2006">
+        <mc:Choice xmlns:p14="http://schemas.microsoft.com/office/powerpoint/2010/main" Requires="p14">
+          <p:contentPart p14:bwMode="auto" r:id="rId4">
+            <p14:nvContentPartPr>
+              <p14:cNvPr id="4" name="Entrada de lápiz 3">
+                <a:extLst>
+                  <a:ext uri="{FF2B5EF4-FFF2-40B4-BE49-F238E27FC236}">
+                    <a16:creationId xmlns:a16="http://schemas.microsoft.com/office/drawing/2014/main" id="{56466103-86FC-45D5-2786-A2CAA140AB2E}"/>
+                  </a:ext>
+                </a:extLst>
+              </p14:cNvPr>
+              <p14:cNvContentPartPr/>
+              <p14:nvPr/>
+            </p14:nvContentPartPr>
+            <p14:xfrm>
+              <a:off x="5612594" y="2334628"/>
+              <a:ext cx="360" cy="360"/>
+            </p14:xfrm>
+          </p:contentPart>
+        </mc:Choice>
+        <mc:Fallback>
+          <p:pic>
+            <p:nvPicPr>
+              <p:cNvPr id="4" name="Entrada de lápiz 3">
+                <a:extLst>
+                  <a:ext uri="{FF2B5EF4-FFF2-40B4-BE49-F238E27FC236}">
+                    <a16:creationId xmlns:a16="http://schemas.microsoft.com/office/drawing/2014/main" id="{56466103-86FC-45D5-2786-A2CAA140AB2E}"/>
+                  </a:ext>
+                </a:extLst>
+              </p:cNvPr>
+              <p:cNvPicPr/>
+              <p:nvPr/>
+            </p:nvPicPr>
+            <p:blipFill>
+              <a:blip r:embed="rId3"/>
+              <a:stretch>
+                <a:fillRect/>
+              </a:stretch>
+            </p:blipFill>
+            <p:spPr>
+              <a:xfrm>
+                <a:off x="5558954" y="2226988"/>
+                <a:ext cx="108000" cy="216000"/>
+              </a:xfrm>
+              <a:prstGeom prst="rect">
+                <a:avLst/>
+              </a:prstGeom>
+            </p:spPr>
+          </p:pic>
+        </mc:Fallback>
+      </mc:AlternateContent>
+      <p:pic>
+        <p:nvPicPr>
+          <p:cNvPr id="8" name="Imagen 7">
+            <a:extLst>
+              <a:ext uri="{FF2B5EF4-FFF2-40B4-BE49-F238E27FC236}">
+                <a16:creationId xmlns:a16="http://schemas.microsoft.com/office/drawing/2014/main" id="{3D2C6F59-A3C2-E158-643C-552375A86FD2}"/>
+              </a:ext>
+            </a:extLst>
+          </p:cNvPr>
+          <p:cNvPicPr>
+            <a:picLocks noChangeAspect="1"/>
+          </p:cNvPicPr>
+          <p:nvPr/>
+        </p:nvPicPr>
+        <p:blipFill>
+          <a:blip r:embed="rId5"/>
+          <a:stretch>
+            <a:fillRect/>
+          </a:stretch>
+        </p:blipFill>
+        <p:spPr>
+          <a:xfrm>
+            <a:off x="3114259" y="1485629"/>
+            <a:ext cx="5963482" cy="3886742"/>
+          </a:xfrm>
+          <a:prstGeom prst="rect">
+            <a:avLst/>
+          </a:prstGeom>
+        </p:spPr>
+      </p:pic>
     </p:spTree>
     <p:extLst>
       <p:ext uri="{BB962C8B-B14F-4D97-AF65-F5344CB8AC3E}">
         <p14:creationId xmlns:p14="http://schemas.microsoft.com/office/powerpoint/2010/main" val="4143775602"/>
+      </p:ext>
+    </p:extLst>
+  </p:cSld>
+  <p:clrMapOvr>
+    <a:masterClrMapping/>
+  </p:clrMapOvr>
+</p:sld>
+</file>
+
+<file path=ppt/slides/slide12.xml><?xml version="1.0" encoding="utf-8"?>
+<p:sld xmlns:a="http://schemas.openxmlformats.org/drawingml/2006/main" xmlns:r="http://schemas.openxmlformats.org/officeDocument/2006/relationships" xmlns:p="http://schemas.openxmlformats.org/presentationml/2006/main">
+  <p:cSld>
+    <p:spTree>
+      <p:nvGrpSpPr>
+        <p:cNvPr id="1" name=""/>
+        <p:cNvGrpSpPr/>
+        <p:nvPr/>
+      </p:nvGrpSpPr>
+      <p:grpSpPr>
+        <a:xfrm>
+          <a:off x="0" y="0"/>
+          <a:ext cx="0" cy="0"/>
+          <a:chOff x="0" y="0"/>
+          <a:chExt cx="0" cy="0"/>
+        </a:xfrm>
+      </p:grpSpPr>
+      <p:sp>
+        <p:nvSpPr>
+          <p:cNvPr id="2" name="Título 1">
+            <a:extLst>
+              <a:ext uri="{FF2B5EF4-FFF2-40B4-BE49-F238E27FC236}">
+                <a16:creationId xmlns:a16="http://schemas.microsoft.com/office/drawing/2014/main" id="{77335897-3BCB-C10A-7B4C-423254201485}"/>
+              </a:ext>
+            </a:extLst>
+          </p:cNvPr>
+          <p:cNvSpPr>
+            <a:spLocks noGrp="1"/>
+          </p:cNvSpPr>
+          <p:nvPr>
+            <p:ph type="title"/>
+          </p:nvPr>
+        </p:nvSpPr>
+        <p:spPr/>
+        <p:txBody>
+          <a:bodyPr/>
+          <a:lstStyle/>
+          <a:p>
+            <a:endParaRPr lang="es-GT"/>
+          </a:p>
+        </p:txBody>
+      </p:sp>
+      <p:pic>
+        <p:nvPicPr>
+          <p:cNvPr id="4" name="Imagen 3">
+            <a:extLst>
+              <a:ext uri="{FF2B5EF4-FFF2-40B4-BE49-F238E27FC236}">
+                <a16:creationId xmlns:a16="http://schemas.microsoft.com/office/drawing/2014/main" id="{3E957DB2-AA1A-449D-E102-1DDF2B6DFA4C}"/>
+              </a:ext>
+            </a:extLst>
+          </p:cNvPr>
+          <p:cNvPicPr>
+            <a:picLocks noChangeAspect="1"/>
+          </p:cNvPicPr>
+          <p:nvPr/>
+        </p:nvPicPr>
+        <p:blipFill>
+          <a:blip r:embed="rId2"/>
+          <a:stretch>
+            <a:fillRect/>
+          </a:stretch>
+        </p:blipFill>
+        <p:spPr>
+          <a:xfrm>
+            <a:off x="1609099" y="1047417"/>
+            <a:ext cx="8973802" cy="4763165"/>
+          </a:xfrm>
+          <a:prstGeom prst="rect">
+            <a:avLst/>
+          </a:prstGeom>
+        </p:spPr>
+      </p:pic>
+      <mc:AlternateContent xmlns:mc="http://schemas.openxmlformats.org/markup-compatibility/2006">
+        <mc:Choice xmlns:p14="http://schemas.microsoft.com/office/powerpoint/2010/main" Requires="p14">
+          <p:contentPart p14:bwMode="auto" r:id="rId3">
+            <p14:nvContentPartPr>
+              <p14:cNvPr id="5" name="Entrada de lápiz 4">
+                <a:extLst>
+                  <a:ext uri="{FF2B5EF4-FFF2-40B4-BE49-F238E27FC236}">
+                    <a16:creationId xmlns:a16="http://schemas.microsoft.com/office/drawing/2014/main" id="{585CA75D-00AA-D0D7-0C0A-2581793755DA}"/>
+                  </a:ext>
+                </a:extLst>
+              </p14:cNvPr>
+              <p14:cNvContentPartPr/>
+              <p14:nvPr/>
+            </p14:nvContentPartPr>
+            <p14:xfrm>
+              <a:off x="3072074" y="1785988"/>
+              <a:ext cx="2014920" cy="416880"/>
+            </p14:xfrm>
+          </p:contentPart>
+        </mc:Choice>
+        <mc:Fallback>
+          <p:pic>
+            <p:nvPicPr>
+              <p:cNvPr id="5" name="Entrada de lápiz 4">
+                <a:extLst>
+                  <a:ext uri="{FF2B5EF4-FFF2-40B4-BE49-F238E27FC236}">
+                    <a16:creationId xmlns:a16="http://schemas.microsoft.com/office/drawing/2014/main" id="{585CA75D-00AA-D0D7-0C0A-2581793755DA}"/>
+                  </a:ext>
+                </a:extLst>
+              </p:cNvPr>
+              <p:cNvPicPr/>
+              <p:nvPr/>
+            </p:nvPicPr>
+            <p:blipFill>
+              <a:blip r:embed="rId4"/>
+              <a:stretch>
+                <a:fillRect/>
+              </a:stretch>
+            </p:blipFill>
+            <p:spPr>
+              <a:xfrm>
+                <a:off x="3018434" y="1677988"/>
+                <a:ext cx="2122560" cy="632520"/>
+              </a:xfrm>
+              <a:prstGeom prst="rect">
+                <a:avLst/>
+              </a:prstGeom>
+            </p:spPr>
+          </p:pic>
+        </mc:Fallback>
+      </mc:AlternateContent>
+      <mc:AlternateContent xmlns:mc="http://schemas.openxmlformats.org/markup-compatibility/2006">
+        <mc:Choice xmlns:p14="http://schemas.microsoft.com/office/powerpoint/2010/main" Requires="p14">
+          <p:contentPart p14:bwMode="auto" r:id="rId5">
+            <p14:nvContentPartPr>
+              <p14:cNvPr id="6" name="Entrada de lápiz 5">
+                <a:extLst>
+                  <a:ext uri="{FF2B5EF4-FFF2-40B4-BE49-F238E27FC236}">
+                    <a16:creationId xmlns:a16="http://schemas.microsoft.com/office/drawing/2014/main" id="{DCA52E14-D68A-F1A8-5941-A692A00F0542}"/>
+                  </a:ext>
+                </a:extLst>
+              </p14:cNvPr>
+              <p14:cNvContentPartPr/>
+              <p14:nvPr/>
+            </p14:nvContentPartPr>
+            <p14:xfrm>
+              <a:off x="5047754" y="4055428"/>
+              <a:ext cx="1755000" cy="438840"/>
+            </p14:xfrm>
+          </p:contentPart>
+        </mc:Choice>
+        <mc:Fallback>
+          <p:pic>
+            <p:nvPicPr>
+              <p:cNvPr id="6" name="Entrada de lápiz 5">
+                <a:extLst>
+                  <a:ext uri="{FF2B5EF4-FFF2-40B4-BE49-F238E27FC236}">
+                    <a16:creationId xmlns:a16="http://schemas.microsoft.com/office/drawing/2014/main" id="{DCA52E14-D68A-F1A8-5941-A692A00F0542}"/>
+                  </a:ext>
+                </a:extLst>
+              </p:cNvPr>
+              <p:cNvPicPr/>
+              <p:nvPr/>
+            </p:nvPicPr>
+            <p:blipFill>
+              <a:blip r:embed="rId6"/>
+              <a:stretch>
+                <a:fillRect/>
+              </a:stretch>
+            </p:blipFill>
+            <p:spPr>
+              <a:xfrm>
+                <a:off x="4993754" y="3947788"/>
+                <a:ext cx="1862640" cy="654480"/>
+              </a:xfrm>
+              <a:prstGeom prst="rect">
+                <a:avLst/>
+              </a:prstGeom>
+            </p:spPr>
+          </p:pic>
+        </mc:Fallback>
+      </mc:AlternateContent>
+      <mc:AlternateContent xmlns:mc="http://schemas.openxmlformats.org/markup-compatibility/2006">
+        <mc:Choice xmlns:p14="http://schemas.microsoft.com/office/powerpoint/2010/main" Requires="p14">
+          <p:contentPart p14:bwMode="auto" r:id="rId7">
+            <p14:nvContentPartPr>
+              <p14:cNvPr id="7" name="Entrada de lápiz 6">
+                <a:extLst>
+                  <a:ext uri="{FF2B5EF4-FFF2-40B4-BE49-F238E27FC236}">
+                    <a16:creationId xmlns:a16="http://schemas.microsoft.com/office/drawing/2014/main" id="{A78D88F6-D915-1A87-AC7E-26DEAE84A94F}"/>
+                  </a:ext>
+                </a:extLst>
+              </p14:cNvPr>
+              <p14:cNvContentPartPr/>
+              <p14:nvPr/>
+            </p14:nvContentPartPr>
+            <p14:xfrm>
+              <a:off x="3133634" y="1795708"/>
+              <a:ext cx="1791360" cy="832320"/>
+            </p14:xfrm>
+          </p:contentPart>
+        </mc:Choice>
+        <mc:Fallback>
+          <p:pic>
+            <p:nvPicPr>
+              <p:cNvPr id="7" name="Entrada de lápiz 6">
+                <a:extLst>
+                  <a:ext uri="{FF2B5EF4-FFF2-40B4-BE49-F238E27FC236}">
+                    <a16:creationId xmlns:a16="http://schemas.microsoft.com/office/drawing/2014/main" id="{A78D88F6-D915-1A87-AC7E-26DEAE84A94F}"/>
+                  </a:ext>
+                </a:extLst>
+              </p:cNvPr>
+              <p:cNvPicPr/>
+              <p:nvPr/>
+            </p:nvPicPr>
+            <p:blipFill>
+              <a:blip r:embed="rId8"/>
+              <a:stretch>
+                <a:fillRect/>
+              </a:stretch>
+            </p:blipFill>
+            <p:spPr>
+              <a:xfrm>
+                <a:off x="3079994" y="1687708"/>
+                <a:ext cx="1899000" cy="1047960"/>
+              </a:xfrm>
+              <a:prstGeom prst="rect">
+                <a:avLst/>
+              </a:prstGeom>
+            </p:spPr>
+          </p:pic>
+        </mc:Fallback>
+      </mc:AlternateContent>
+    </p:spTree>
+    <p:extLst>
+      <p:ext uri="{BB962C8B-B14F-4D97-AF65-F5344CB8AC3E}">
+        <p14:creationId xmlns:p14="http://schemas.microsoft.com/office/powerpoint/2010/main" val="1666678066"/>
+      </p:ext>
+    </p:extLst>
+  </p:cSld>
+  <p:clrMapOvr>
+    <a:masterClrMapping/>
+  </p:clrMapOvr>
+</p:sld>
+</file>
+
+<file path=ppt/slides/slide13.xml><?xml version="1.0" encoding="utf-8"?>
+<p:sld xmlns:a="http://schemas.openxmlformats.org/drawingml/2006/main" xmlns:r="http://schemas.openxmlformats.org/officeDocument/2006/relationships" xmlns:p="http://schemas.openxmlformats.org/presentationml/2006/main">
+  <p:cSld>
+    <p:spTree>
+      <p:nvGrpSpPr>
+        <p:cNvPr id="1" name=""/>
+        <p:cNvGrpSpPr/>
+        <p:nvPr/>
+      </p:nvGrpSpPr>
+      <p:grpSpPr>
+        <a:xfrm>
+          <a:off x="0" y="0"/>
+          <a:ext cx="0" cy="0"/>
+          <a:chOff x="0" y="0"/>
+          <a:chExt cx="0" cy="0"/>
+        </a:xfrm>
+      </p:grpSpPr>
+      <p:sp>
+        <p:nvSpPr>
+          <p:cNvPr id="2" name="Título 1">
+            <a:extLst>
+              <a:ext uri="{FF2B5EF4-FFF2-40B4-BE49-F238E27FC236}">
+                <a16:creationId xmlns:a16="http://schemas.microsoft.com/office/drawing/2014/main" id="{293FF0CB-563F-AE8A-1CAD-1B202DD0B7F9}"/>
+              </a:ext>
+            </a:extLst>
+          </p:cNvPr>
+          <p:cNvSpPr>
+            <a:spLocks noGrp="1"/>
+          </p:cNvSpPr>
+          <p:nvPr>
+            <p:ph type="title"/>
+          </p:nvPr>
+        </p:nvSpPr>
+        <p:spPr/>
+        <p:txBody>
+          <a:bodyPr/>
+          <a:lstStyle/>
+          <a:p>
+            <a:endParaRPr lang="es-GT"/>
+          </a:p>
+        </p:txBody>
+      </p:sp>
+      <mc:AlternateContent xmlns:mc="http://schemas.openxmlformats.org/markup-compatibility/2006">
+        <mc:Choice xmlns:p14="http://schemas.microsoft.com/office/powerpoint/2010/main" Requires="p14">
+          <p:contentPart p14:bwMode="auto" r:id="rId2">
+            <p14:nvContentPartPr>
+              <p14:cNvPr id="3" name="Entrada de lápiz 2">
+                <a:extLst>
+                  <a:ext uri="{FF2B5EF4-FFF2-40B4-BE49-F238E27FC236}">
+                    <a16:creationId xmlns:a16="http://schemas.microsoft.com/office/drawing/2014/main" id="{C3167D0F-2D6F-D8DA-C4D6-65511F5378EF}"/>
+                  </a:ext>
+                </a:extLst>
+              </p14:cNvPr>
+              <p14:cNvContentPartPr/>
+              <p14:nvPr/>
+            </p14:nvContentPartPr>
+            <p14:xfrm>
+              <a:off x="4740674" y="4782628"/>
+              <a:ext cx="360" cy="360"/>
+            </p14:xfrm>
+          </p:contentPart>
+        </mc:Choice>
+        <mc:Fallback>
+          <p:pic>
+            <p:nvPicPr>
+              <p:cNvPr id="3" name="Entrada de lápiz 2">
+                <a:extLst>
+                  <a:ext uri="{FF2B5EF4-FFF2-40B4-BE49-F238E27FC236}">
+                    <a16:creationId xmlns:a16="http://schemas.microsoft.com/office/drawing/2014/main" id="{C3167D0F-2D6F-D8DA-C4D6-65511F5378EF}"/>
+                  </a:ext>
+                </a:extLst>
+              </p:cNvPr>
+              <p:cNvPicPr/>
+              <p:nvPr/>
+            </p:nvPicPr>
+            <p:blipFill>
+              <a:blip r:embed="rId3"/>
+              <a:stretch>
+                <a:fillRect/>
+              </a:stretch>
+            </p:blipFill>
+            <p:spPr>
+              <a:xfrm>
+                <a:off x="4686674" y="4674988"/>
+                <a:ext cx="108000" cy="216000"/>
+              </a:xfrm>
+              <a:prstGeom prst="rect">
+                <a:avLst/>
+              </a:prstGeom>
+            </p:spPr>
+          </p:pic>
+        </mc:Fallback>
+      </mc:AlternateContent>
+      <p:pic>
+        <p:nvPicPr>
+          <p:cNvPr id="5" name="Imagen 4">
+            <a:extLst>
+              <a:ext uri="{FF2B5EF4-FFF2-40B4-BE49-F238E27FC236}">
+                <a16:creationId xmlns:a16="http://schemas.microsoft.com/office/drawing/2014/main" id="{273D6380-81D6-5312-227A-D72981622B2D}"/>
+              </a:ext>
+            </a:extLst>
+          </p:cNvPr>
+          <p:cNvPicPr>
+            <a:picLocks noChangeAspect="1"/>
+          </p:cNvPicPr>
+          <p:nvPr/>
+        </p:nvPicPr>
+        <p:blipFill>
+          <a:blip r:embed="rId4"/>
+          <a:stretch>
+            <a:fillRect/>
+          </a:stretch>
+        </p:blipFill>
+        <p:spPr>
+          <a:xfrm>
+            <a:off x="3509601" y="2376340"/>
+            <a:ext cx="5172797" cy="2105319"/>
+          </a:xfrm>
+          <a:prstGeom prst="rect">
+            <a:avLst/>
+          </a:prstGeom>
+        </p:spPr>
+      </p:pic>
+    </p:spTree>
+    <p:extLst>
+      <p:ext uri="{BB962C8B-B14F-4D97-AF65-F5344CB8AC3E}">
+        <p14:creationId xmlns:p14="http://schemas.microsoft.com/office/powerpoint/2010/main" val="3326171532"/>
+      </p:ext>
+    </p:extLst>
+  </p:cSld>
+  <p:clrMapOvr>
+    <a:masterClrMapping/>
+  </p:clrMapOvr>
+</p:sld>
+</file>
+
+<file path=ppt/slides/slide14.xml><?xml version="1.0" encoding="utf-8"?>
+<p:sld xmlns:a="http://schemas.openxmlformats.org/drawingml/2006/main" xmlns:r="http://schemas.openxmlformats.org/officeDocument/2006/relationships" xmlns:p="http://schemas.openxmlformats.org/presentationml/2006/main">
+  <p:cSld>
+    <p:spTree>
+      <p:nvGrpSpPr>
+        <p:cNvPr id="1" name=""/>
+        <p:cNvGrpSpPr/>
+        <p:nvPr/>
+      </p:nvGrpSpPr>
+      <p:grpSpPr>
+        <a:xfrm>
+          <a:off x="0" y="0"/>
+          <a:ext cx="0" cy="0"/>
+          <a:chOff x="0" y="0"/>
+          <a:chExt cx="0" cy="0"/>
+        </a:xfrm>
+      </p:grpSpPr>
+      <p:sp>
+        <p:nvSpPr>
+          <p:cNvPr id="2" name="Título 1">
+            <a:extLst>
+              <a:ext uri="{FF2B5EF4-FFF2-40B4-BE49-F238E27FC236}">
+                <a16:creationId xmlns:a16="http://schemas.microsoft.com/office/drawing/2014/main" id="{7C8A99A1-8DC6-1312-344D-6A8A10490FA3}"/>
+              </a:ext>
+            </a:extLst>
+          </p:cNvPr>
+          <p:cNvSpPr>
+            <a:spLocks noGrp="1"/>
+          </p:cNvSpPr>
+          <p:nvPr>
+            <p:ph type="title"/>
+          </p:nvPr>
+        </p:nvSpPr>
+        <p:spPr/>
+        <p:txBody>
+          <a:bodyPr/>
+          <a:lstStyle/>
+          <a:p>
+            <a:endParaRPr lang="es-GT"/>
+          </a:p>
+        </p:txBody>
+      </p:sp>
+    </p:spTree>
+    <p:extLst>
+      <p:ext uri="{BB962C8B-B14F-4D97-AF65-F5344CB8AC3E}">
+        <p14:creationId xmlns:p14="http://schemas.microsoft.com/office/powerpoint/2010/main" val="4291246061"/>
+      </p:ext>
+    </p:extLst>
+  </p:cSld>
+  <p:clrMapOvr>
+    <a:masterClrMapping/>
+  </p:clrMapOvr>
+</p:sld>
+</file>
+
+<file path=ppt/slides/slide15.xml><?xml version="1.0" encoding="utf-8"?>
+<p:sld xmlns:a="http://schemas.openxmlformats.org/drawingml/2006/main" xmlns:r="http://schemas.openxmlformats.org/officeDocument/2006/relationships" xmlns:p="http://schemas.openxmlformats.org/presentationml/2006/main">
+  <p:cSld>
+    <p:spTree>
+      <p:nvGrpSpPr>
+        <p:cNvPr id="1" name=""/>
+        <p:cNvGrpSpPr/>
+        <p:nvPr/>
+      </p:nvGrpSpPr>
+      <p:grpSpPr>
+        <a:xfrm>
+          <a:off x="0" y="0"/>
+          <a:ext cx="0" cy="0"/>
+          <a:chOff x="0" y="0"/>
+          <a:chExt cx="0" cy="0"/>
+        </a:xfrm>
+      </p:grpSpPr>
+      <p:sp>
+        <p:nvSpPr>
+          <p:cNvPr id="2" name="Título 1">
+            <a:extLst>
+              <a:ext uri="{FF2B5EF4-FFF2-40B4-BE49-F238E27FC236}">
+                <a16:creationId xmlns:a16="http://schemas.microsoft.com/office/drawing/2014/main" id="{106B0886-8117-5F63-DEE3-D72659147214}"/>
+              </a:ext>
+            </a:extLst>
+          </p:cNvPr>
+          <p:cNvSpPr>
+            <a:spLocks noGrp="1"/>
+          </p:cNvSpPr>
+          <p:nvPr>
+            <p:ph type="title"/>
+          </p:nvPr>
+        </p:nvSpPr>
+        <p:spPr/>
+        <p:txBody>
+          <a:bodyPr/>
+          <a:lstStyle/>
+          <a:p>
+            <a:endParaRPr lang="es-GT"/>
+          </a:p>
+        </p:txBody>
+      </p:sp>
+    </p:spTree>
+    <p:extLst>
+      <p:ext uri="{BB962C8B-B14F-4D97-AF65-F5344CB8AC3E}">
+        <p14:creationId xmlns:p14="http://schemas.microsoft.com/office/powerpoint/2010/main" val="2903891198"/>
+      </p:ext>
+    </p:extLst>
+  </p:cSld>
+  <p:clrMapOvr>
+    <a:masterClrMapping/>
+  </p:clrMapOvr>
+</p:sld>
+</file>
+
+<file path=ppt/slides/slide16.xml><?xml version="1.0" encoding="utf-8"?>
+<p:sld xmlns:a="http://schemas.openxmlformats.org/drawingml/2006/main" xmlns:r="http://schemas.openxmlformats.org/officeDocument/2006/relationships" xmlns:p="http://schemas.openxmlformats.org/presentationml/2006/main">
+  <p:cSld>
+    <p:spTree>
+      <p:nvGrpSpPr>
+        <p:cNvPr id="1" name=""/>
+        <p:cNvGrpSpPr/>
+        <p:nvPr/>
+      </p:nvGrpSpPr>
+      <p:grpSpPr>
+        <a:xfrm>
+          <a:off x="0" y="0"/>
+          <a:ext cx="0" cy="0"/>
+          <a:chOff x="0" y="0"/>
+          <a:chExt cx="0" cy="0"/>
+        </a:xfrm>
+      </p:grpSpPr>
+      <p:sp>
+        <p:nvSpPr>
+          <p:cNvPr id="2" name="Título 1">
+            <a:extLst>
+              <a:ext uri="{FF2B5EF4-FFF2-40B4-BE49-F238E27FC236}">
+                <a16:creationId xmlns:a16="http://schemas.microsoft.com/office/drawing/2014/main" id="{32AF3D0B-C119-2EAE-832F-C13937F3F6DF}"/>
+              </a:ext>
+            </a:extLst>
+          </p:cNvPr>
+          <p:cNvSpPr>
+            <a:spLocks noGrp="1"/>
+          </p:cNvSpPr>
+          <p:nvPr>
+            <p:ph type="title"/>
+          </p:nvPr>
+        </p:nvSpPr>
+        <p:spPr/>
+        <p:txBody>
+          <a:bodyPr/>
+          <a:lstStyle/>
+          <a:p>
+            <a:endParaRPr lang="es-GT"/>
+          </a:p>
+        </p:txBody>
+      </p:sp>
+    </p:spTree>
+    <p:extLst>
+      <p:ext uri="{BB962C8B-B14F-4D97-AF65-F5344CB8AC3E}">
+        <p14:creationId xmlns:p14="http://schemas.microsoft.com/office/powerpoint/2010/main" val="631799028"/>
+      </p:ext>
+    </p:extLst>
+  </p:cSld>
+  <p:clrMapOvr>
+    <a:masterClrMapping/>
+  </p:clrMapOvr>
+</p:sld>
+</file>
+
+<file path=ppt/slides/slide17.xml><?xml version="1.0" encoding="utf-8"?>
+<p:sld xmlns:a="http://schemas.openxmlformats.org/drawingml/2006/main" xmlns:r="http://schemas.openxmlformats.org/officeDocument/2006/relationships" xmlns:p="http://schemas.openxmlformats.org/presentationml/2006/main">
+  <p:cSld>
+    <p:spTree>
+      <p:nvGrpSpPr>
+        <p:cNvPr id="1" name=""/>
+        <p:cNvGrpSpPr/>
+        <p:nvPr/>
+      </p:nvGrpSpPr>
+      <p:grpSpPr>
+        <a:xfrm>
+          <a:off x="0" y="0"/>
+          <a:ext cx="0" cy="0"/>
+          <a:chOff x="0" y="0"/>
+          <a:chExt cx="0" cy="0"/>
+        </a:xfrm>
+      </p:grpSpPr>
+      <p:sp>
+        <p:nvSpPr>
+          <p:cNvPr id="2" name="Título 1">
+            <a:extLst>
+              <a:ext uri="{FF2B5EF4-FFF2-40B4-BE49-F238E27FC236}">
+                <a16:creationId xmlns:a16="http://schemas.microsoft.com/office/drawing/2014/main" id="{545F25C1-2B43-A940-5C11-54BD89D89ABC}"/>
+              </a:ext>
+            </a:extLst>
+          </p:cNvPr>
+          <p:cNvSpPr>
+            <a:spLocks noGrp="1"/>
+          </p:cNvSpPr>
+          <p:nvPr>
+            <p:ph type="title"/>
+          </p:nvPr>
+        </p:nvSpPr>
+        <p:spPr/>
+        <p:txBody>
+          <a:bodyPr/>
+          <a:lstStyle/>
+          <a:p>
+            <a:endParaRPr lang="es-GT"/>
+          </a:p>
+        </p:txBody>
+      </p:sp>
+    </p:spTree>
+    <p:extLst>
+      <p:ext uri="{BB962C8B-B14F-4D97-AF65-F5344CB8AC3E}">
+        <p14:creationId xmlns:p14="http://schemas.microsoft.com/office/powerpoint/2010/main" val="35924941"/>
+      </p:ext>
+    </p:extLst>
+  </p:cSld>
+  <p:clrMapOvr>
+    <a:masterClrMapping/>
+  </p:clrMapOvr>
+</p:sld>
+</file>
+
+<file path=ppt/slides/slide18.xml><?xml version="1.0" encoding="utf-8"?>
+<p:sld xmlns:a="http://schemas.openxmlformats.org/drawingml/2006/main" xmlns:r="http://schemas.openxmlformats.org/officeDocument/2006/relationships" xmlns:p="http://schemas.openxmlformats.org/presentationml/2006/main">
+  <p:cSld>
+    <p:spTree>
+      <p:nvGrpSpPr>
+        <p:cNvPr id="1" name=""/>
+        <p:cNvGrpSpPr/>
+        <p:nvPr/>
+      </p:nvGrpSpPr>
+      <p:grpSpPr>
+        <a:xfrm>
+          <a:off x="0" y="0"/>
+          <a:ext cx="0" cy="0"/>
+          <a:chOff x="0" y="0"/>
+          <a:chExt cx="0" cy="0"/>
+        </a:xfrm>
+      </p:grpSpPr>
+      <p:sp>
+        <p:nvSpPr>
+          <p:cNvPr id="2" name="Título 1">
+            <a:extLst>
+              <a:ext uri="{FF2B5EF4-FFF2-40B4-BE49-F238E27FC236}">
+                <a16:creationId xmlns:a16="http://schemas.microsoft.com/office/drawing/2014/main" id="{BE9E721D-51CC-3C4E-B7B0-6385228BD256}"/>
+              </a:ext>
+            </a:extLst>
+          </p:cNvPr>
+          <p:cNvSpPr>
+            <a:spLocks noGrp="1"/>
+          </p:cNvSpPr>
+          <p:nvPr>
+            <p:ph type="title"/>
+          </p:nvPr>
+        </p:nvSpPr>
+        <p:spPr/>
+        <p:txBody>
+          <a:bodyPr/>
+          <a:lstStyle/>
+          <a:p>
+            <a:endParaRPr lang="es-GT"/>
+          </a:p>
+        </p:txBody>
+      </p:sp>
+    </p:spTree>
+    <p:extLst>
+      <p:ext uri="{BB962C8B-B14F-4D97-AF65-F5344CB8AC3E}">
+        <p14:creationId xmlns:p14="http://schemas.microsoft.com/office/powerpoint/2010/main" val="3000500101"/>
+      </p:ext>
+    </p:extLst>
+  </p:cSld>
+  <p:clrMapOvr>
+    <a:masterClrMapping/>
+  </p:clrMapOvr>
+</p:sld>
+</file>
+
+<file path=ppt/slides/slide19.xml><?xml version="1.0" encoding="utf-8"?>
+<p:sld xmlns:a="http://schemas.openxmlformats.org/drawingml/2006/main" xmlns:r="http://schemas.openxmlformats.org/officeDocument/2006/relationships" xmlns:p="http://schemas.openxmlformats.org/presentationml/2006/main">
+  <p:cSld>
+    <p:spTree>
+      <p:nvGrpSpPr>
+        <p:cNvPr id="1" name=""/>
+        <p:cNvGrpSpPr/>
+        <p:nvPr/>
+      </p:nvGrpSpPr>
+      <p:grpSpPr>
+        <a:xfrm>
+          <a:off x="0" y="0"/>
+          <a:ext cx="0" cy="0"/>
+          <a:chOff x="0" y="0"/>
+          <a:chExt cx="0" cy="0"/>
+        </a:xfrm>
+      </p:grpSpPr>
+      <p:sp>
+        <p:nvSpPr>
+          <p:cNvPr id="2" name="Título 1">
+            <a:extLst>
+              <a:ext uri="{FF2B5EF4-FFF2-40B4-BE49-F238E27FC236}">
+                <a16:creationId xmlns:a16="http://schemas.microsoft.com/office/drawing/2014/main" id="{3F732183-1D45-3BB0-B599-3DAF0935FC4F}"/>
+              </a:ext>
+            </a:extLst>
+          </p:cNvPr>
+          <p:cNvSpPr>
+            <a:spLocks noGrp="1"/>
+          </p:cNvSpPr>
+          <p:nvPr>
+            <p:ph type="title"/>
+          </p:nvPr>
+        </p:nvSpPr>
+        <p:spPr/>
+        <p:txBody>
+          <a:bodyPr/>
+          <a:lstStyle/>
+          <a:p>
+            <a:endParaRPr lang="es-GT"/>
+          </a:p>
+        </p:txBody>
+      </p:sp>
+    </p:spTree>
+    <p:extLst>
+      <p:ext uri="{BB962C8B-B14F-4D97-AF65-F5344CB8AC3E}">
+        <p14:creationId xmlns:p14="http://schemas.microsoft.com/office/powerpoint/2010/main" val="975028337"/>
       </p:ext>
     </p:extLst>
   </p:cSld>
@@ -4034,7 +5225,14 @@
           <a:bodyPr/>
           <a:lstStyle/>
           <a:p>
-            <a:endParaRPr lang="es-GT"/>
+            <a:r>
+              <a:rPr lang="es-GT" dirty="0"/>
+              <a:t>TEXTO</a:t>
+            </a:r>
+            <a:br>
+              <a:rPr lang="es-GT" dirty="0"/>
+            </a:br>
+            <a:endParaRPr lang="es-GT" dirty="0"/>
           </a:p>
         </p:txBody>
       </p:sp>
@@ -4093,6 +5291,138 @@
           </a:p>
         </p:txBody>
       </p:sp>
+      <p:pic>
+        <p:nvPicPr>
+          <p:cNvPr id="4" name="Imagen 3">
+            <a:extLst>
+              <a:ext uri="{FF2B5EF4-FFF2-40B4-BE49-F238E27FC236}">
+                <a16:creationId xmlns:a16="http://schemas.microsoft.com/office/drawing/2014/main" id="{E6F37791-0A67-BD75-CA5B-DBDD81EB06AA}"/>
+              </a:ext>
+            </a:extLst>
+          </p:cNvPr>
+          <p:cNvPicPr>
+            <a:picLocks noChangeAspect="1"/>
+          </p:cNvPicPr>
+          <p:nvPr/>
+        </p:nvPicPr>
+        <p:blipFill>
+          <a:blip r:embed="rId2"/>
+          <a:stretch>
+            <a:fillRect/>
+          </a:stretch>
+        </p:blipFill>
+        <p:spPr>
+          <a:xfrm>
+            <a:off x="1532888" y="937865"/>
+            <a:ext cx="9126224" cy="4982270"/>
+          </a:xfrm>
+          <a:prstGeom prst="rect">
+            <a:avLst/>
+          </a:prstGeom>
+        </p:spPr>
+      </p:pic>
+      <mc:AlternateContent xmlns:mc="http://schemas.openxmlformats.org/markup-compatibility/2006">
+        <mc:Choice xmlns:p14="http://schemas.microsoft.com/office/powerpoint/2010/main" Requires="p14">
+          <p:contentPart p14:bwMode="auto" r:id="rId3">
+            <p14:nvContentPartPr>
+              <p14:cNvPr id="5" name="Entrada de lápiz 4">
+                <a:extLst>
+                  <a:ext uri="{FF2B5EF4-FFF2-40B4-BE49-F238E27FC236}">
+                    <a16:creationId xmlns:a16="http://schemas.microsoft.com/office/drawing/2014/main" id="{A7EB19D4-8814-5373-1F06-A0156D87AE45}"/>
+                  </a:ext>
+                </a:extLst>
+              </p14:cNvPr>
+              <p14:cNvContentPartPr/>
+              <p14:nvPr/>
+            </p14:nvContentPartPr>
+            <p14:xfrm>
+              <a:off x="1603274" y="1292428"/>
+              <a:ext cx="2748240" cy="504720"/>
+            </p14:xfrm>
+          </p:contentPart>
+        </mc:Choice>
+        <mc:Fallback>
+          <p:pic>
+            <p:nvPicPr>
+              <p:cNvPr id="5" name="Entrada de lápiz 4">
+                <a:extLst>
+                  <a:ext uri="{FF2B5EF4-FFF2-40B4-BE49-F238E27FC236}">
+                    <a16:creationId xmlns:a16="http://schemas.microsoft.com/office/drawing/2014/main" id="{A7EB19D4-8814-5373-1F06-A0156D87AE45}"/>
+                  </a:ext>
+                </a:extLst>
+              </p:cNvPr>
+              <p:cNvPicPr/>
+              <p:nvPr/>
+            </p:nvPicPr>
+            <p:blipFill>
+              <a:blip r:embed="rId4"/>
+              <a:stretch>
+                <a:fillRect/>
+              </a:stretch>
+            </p:blipFill>
+            <p:spPr>
+              <a:xfrm>
+                <a:off x="1549274" y="1184428"/>
+                <a:ext cx="2855880" cy="720360"/>
+              </a:xfrm>
+              <a:prstGeom prst="rect">
+                <a:avLst/>
+              </a:prstGeom>
+            </p:spPr>
+          </p:pic>
+        </mc:Fallback>
+      </mc:AlternateContent>
+      <mc:AlternateContent xmlns:mc="http://schemas.openxmlformats.org/markup-compatibility/2006">
+        <mc:Choice xmlns:p14="http://schemas.microsoft.com/office/powerpoint/2010/main" Requires="p14">
+          <p:contentPart p14:bwMode="auto" r:id="rId5">
+            <p14:nvContentPartPr>
+              <p14:cNvPr id="6" name="Entrada de lápiz 5">
+                <a:extLst>
+                  <a:ext uri="{FF2B5EF4-FFF2-40B4-BE49-F238E27FC236}">
+                    <a16:creationId xmlns:a16="http://schemas.microsoft.com/office/drawing/2014/main" id="{FE282762-B10C-323E-8261-AA0BCB379051}"/>
+                  </a:ext>
+                </a:extLst>
+              </p14:cNvPr>
+              <p14:cNvContentPartPr/>
+              <p14:nvPr/>
+            </p14:nvContentPartPr>
+            <p14:xfrm>
+              <a:off x="421754" y="4726468"/>
+              <a:ext cx="360" cy="360"/>
+            </p14:xfrm>
+          </p:contentPart>
+        </mc:Choice>
+        <mc:Fallback>
+          <p:pic>
+            <p:nvPicPr>
+              <p:cNvPr id="6" name="Entrada de lápiz 5">
+                <a:extLst>
+                  <a:ext uri="{FF2B5EF4-FFF2-40B4-BE49-F238E27FC236}">
+                    <a16:creationId xmlns:a16="http://schemas.microsoft.com/office/drawing/2014/main" id="{FE282762-B10C-323E-8261-AA0BCB379051}"/>
+                  </a:ext>
+                </a:extLst>
+              </p:cNvPr>
+              <p:cNvPicPr/>
+              <p:nvPr/>
+            </p:nvPicPr>
+            <p:blipFill>
+              <a:blip r:embed="rId6"/>
+              <a:stretch>
+                <a:fillRect/>
+              </a:stretch>
+            </p:blipFill>
+            <p:spPr>
+              <a:xfrm>
+                <a:off x="367754" y="4618468"/>
+                <a:ext cx="108000" cy="216000"/>
+              </a:xfrm>
+              <a:prstGeom prst="rect">
+                <a:avLst/>
+              </a:prstGeom>
+            </p:spPr>
+          </p:pic>
+        </mc:Fallback>
+      </mc:AlternateContent>
     </p:spTree>
     <p:extLst>
       <p:ext uri="{BB962C8B-B14F-4D97-AF65-F5344CB8AC3E}">
